--- a/Topic_B/Exam_Practice/TB-L10_Writing_Workshop_Topic_B_Listening_and_Reading_Workshop.pptx
+++ b/Topic_B/Exam_Practice/TB-L10_Writing_Workshop_Topic_B_Listening_and_Reading_Workshop.pptx
@@ -784,7 +784,11 @@
           <a:lstStyle/>
           <a:p>
             <a:r>
-              <a:rPr lang="en-US" dirty="0"/>
+              <a:rPr lang="ar-SA" dirty="0">
+                <a:latin typeface="Amiri" pitchFamily="2" charset="-78"/>
+                <a:ea typeface="Amiri" pitchFamily="2" charset="-78"/>
+                <a:cs typeface="Amiri" pitchFamily="2" charset="-78"/>
+              </a:rPr>
               <a:t>Q3 (3 min to choose and read). Title (أ) suits Core and Develop; title (ب) suits Stretch.</a:t>
             </a:r>
             <a:endParaRPr lang="en-US" dirty="0"/>
@@ -1403,7 +1407,11 @@
           <a:lstStyle/>
           <a:p>
             <a:r>
-              <a:rPr lang="en-US" dirty="0"/>
+              <a:rPr lang="ar-SA" dirty="0">
+                <a:latin typeface="Amiri" pitchFamily="2" charset="-78"/>
+                <a:ea typeface="Amiri" pitchFamily="2" charset="-78"/>
+                <a:cs typeface="Amiri" pitchFamily="2" charset="-78"/>
+              </a:rPr>
               <a:t>WELCOME (1 min) — while students join.
 • Greet each student by name as they arrive: السَّلَامُ عَلَيْكُمْ. Take the register (Pastoral Tracker: attendance 0/1).
 • 2-MINUTE CHECK-IN (SEND training): a private chat to any student who seemed unsettled last lesson — “Are you okay today? 👍 / 👎”.
@@ -1936,7 +1944,11 @@
           <a:lstStyle/>
           <a:p>
             <a:r>
-              <a:rPr lang="en-US" dirty="0"/>
+              <a:rPr lang="ar-SA" dirty="0">
+                <a:latin typeface="Amiri" pitchFamily="2" charset="-78"/>
+                <a:ea typeface="Amiri" pitchFamily="2" charset="-78"/>
+                <a:cs typeface="Amiri" pitchFamily="2" charset="-78"/>
+              </a:rPr>
               <a:t>Question words: مَنْ (who) · مِنْ أَيْنَ (from where) · صِفِي (describe) · مَاذَا (what) · كَيْفَ (how) · ادْعِي (invite) — watch the pronouns: hum · maʿahum · bihim.</a:t>
             </a:r>
             <a:endParaRPr lang="en-US" dirty="0"/>
@@ -2508,6 +2520,7 @@
                   <a:srgbClr val="D4AF37"/>
                 </a:solidFill>
                 <a:latin typeface="Amiri" pitchFamily="2" charset="-78"/>
+                <a:ea typeface="Amiri" pitchFamily="2" charset="-78"/>
                 <a:cs typeface="Amiri" pitchFamily="2" charset="-78"/>
               </a:rPr>
               <a:t>م</a:t>
@@ -2714,6 +2727,7 @@
                   <a:srgbClr val="D4AF37"/>
                 </a:solidFill>
                 <a:latin typeface="Amiri" pitchFamily="2" charset="-78"/>
+                <a:ea typeface="Amiri" pitchFamily="2" charset="-78"/>
                 <a:cs typeface="Amiri" pitchFamily="2" charset="-78"/>
               </a:rPr>
               <a:t>وَرْشَةُ الكِتَابَةِ — الجِيرَانُ الجُدُدُ</a:t>
@@ -3171,6 +3185,7 @@
                   <a:srgbClr val="D4AF37"/>
                 </a:solidFill>
                 <a:latin typeface="Amiri" pitchFamily="2" charset="-78"/>
+                <a:ea typeface="Amiri" pitchFamily="2" charset="-78"/>
                 <a:cs typeface="Amiri" pitchFamily="2" charset="-78"/>
               </a:rPr>
               <a:t>م</a:t>
@@ -3491,6 +3506,7 @@
                   <a:srgbClr val="8A6D1E"/>
                 </a:solidFill>
                 <a:latin typeface="Amiri" pitchFamily="2" charset="-78"/>
+                <a:ea typeface="Amiri" pitchFamily="2" charset="-78"/>
                 <a:cs typeface="Amiri" pitchFamily="2" charset="-78"/>
               </a:rPr>
               <a:t>نَمُوذَجُ الإِجَابَةِ</a:t>
@@ -3604,6 +3620,7 @@
                   <a:srgbClr val="1F2A37"/>
                 </a:solidFill>
                 <a:latin typeface="Amiri" pitchFamily="2" charset="-78"/>
+                <a:ea typeface="Amiri" pitchFamily="2" charset="-78"/>
                 <a:cs typeface="Amiri" pitchFamily="2" charset="-78"/>
               </a:rPr>
               <a:t>مَرْحَبًا يَا نَادِيَةُ،</a:t>
@@ -3623,6 +3640,7 @@
                   <a:srgbClr val="1F2A37"/>
                 </a:solidFill>
                 <a:latin typeface="Amiri" pitchFamily="2" charset="-78"/>
+                <a:ea typeface="Amiri" pitchFamily="2" charset="-78"/>
                 <a:cs typeface="Amiri" pitchFamily="2" charset="-78"/>
               </a:rPr>
               <a:t>كَيْفَ حَالُكِ؟ عِنْدَنَا جِيرَانٌ جُدُدٌ! انْتَقَلُوا إِلَى البَيْتِ الَّذِي بِجَانِبِ بَيْتِنَا يَوْمَ السَّبْتِ. هُمْ أُسْرَةٌ مَغْرِبِيَّةٌ: أَبٌ وَأُمٌّ وَبِنْتَانِ. البِنْتُ الكُبْرَى اسْمُهَا لَيْلَى، وَهِيَ فِي عُمْرِي. هِيَ طَوِيلَةٌ، وَشَعْرُهَا أَسْوَدُ، وَتُحِبُّ الرَّسْمَ مِثْلِي. أَمْسِ سَاعَدْتُهُمْ فِي تَرْتِيبِ الأَثَاثِ، وَشَرِبْنَا الشَّايَ مَعًا. يَوْمَ الجُمُعَةِ سَنَدْعُوهُمْ إِلَى العَشَاءِ فِي بَيْتِنَا. هَلْ تَأْتِينَ أَنْتِ أَيْضًا؟</a:t>
@@ -3642,6 +3660,7 @@
                   <a:srgbClr val="1F2A37"/>
                 </a:solidFill>
                 <a:latin typeface="Amiri" pitchFamily="2" charset="-78"/>
+                <a:ea typeface="Amiri" pitchFamily="2" charset="-78"/>
                 <a:cs typeface="Amiri" pitchFamily="2" charset="-78"/>
               </a:rPr>
               <a:t>مَعَ السَّلَامَةِ،</a:t>
@@ -3661,6 +3680,7 @@
                   <a:srgbClr val="1F2A37"/>
                 </a:solidFill>
                 <a:latin typeface="Amiri" pitchFamily="2" charset="-78"/>
+                <a:ea typeface="Amiri" pitchFamily="2" charset="-78"/>
                 <a:cs typeface="Amiri" pitchFamily="2" charset="-78"/>
               </a:rPr>
               <a:t>مَرْيَمُ</a:t>
@@ -3824,11 +3844,12 @@
               <a:buNone/>
             </a:pPr>
             <a:r>
-              <a:rPr lang="en-US" sz="950" b="1" dirty="0">
+              <a:rPr lang="ar-SA" sz="950" b="1" dirty="0">
                 <a:solidFill>
                   <a:srgbClr val="FFFFFF"/>
                 </a:solidFill>
                 <a:latin typeface="Calibri" pitchFamily="34" charset="0"/>
+                <a:ea typeface="Amiri" pitchFamily="2" charset="-78"/>
                 <a:cs typeface="Amiri" pitchFamily="2" charset="-78"/>
               </a:rPr>
               <a:t>الَّذِي بِجَانِبِ بَيْتِنَا</a:t>
@@ -3889,11 +3910,12 @@
               <a:buNone/>
             </a:pPr>
             <a:r>
-              <a:rPr lang="en-US" sz="950" b="1" dirty="0">
+              <a:rPr lang="ar-SA" sz="950" b="1" dirty="0">
                 <a:solidFill>
                   <a:srgbClr val="FFFFFF"/>
                 </a:solidFill>
                 <a:latin typeface="Calibri" pitchFamily="34" charset="0"/>
+                <a:ea typeface="Amiri" pitchFamily="2" charset="-78"/>
                 <a:cs typeface="Amiri" pitchFamily="2" charset="-78"/>
               </a:rPr>
               <a:t>بِنْتَانِ</a:t>
@@ -3954,11 +3976,12 @@
               <a:buNone/>
             </a:pPr>
             <a:r>
-              <a:rPr lang="en-US" sz="950" b="1" dirty="0">
+              <a:rPr lang="ar-SA" sz="950" b="1" dirty="0">
                 <a:solidFill>
                   <a:srgbClr val="FFFFFF"/>
                 </a:solidFill>
                 <a:latin typeface="Calibri" pitchFamily="34" charset="0"/>
+                <a:ea typeface="Amiri" pitchFamily="2" charset="-78"/>
                 <a:cs typeface="Amiri" pitchFamily="2" charset="-78"/>
               </a:rPr>
               <a:t>سَاعَدْتُهُمْ</a:t>
@@ -4019,11 +4042,12 @@
               <a:buNone/>
             </a:pPr>
             <a:r>
-              <a:rPr lang="en-US" sz="950" b="1" dirty="0">
+              <a:rPr lang="ar-SA" sz="950" b="1" dirty="0">
                 <a:solidFill>
                   <a:srgbClr val="FFFFFF"/>
                 </a:solidFill>
                 <a:latin typeface="Calibri" pitchFamily="34" charset="0"/>
+                <a:ea typeface="Amiri" pitchFamily="2" charset="-78"/>
                 <a:cs typeface="Amiri" pitchFamily="2" charset="-78"/>
               </a:rPr>
               <a:t>سَنَدْعُوهُمْ</a:t>
@@ -4157,6 +4181,7 @@
                   <a:srgbClr val="D4AF37"/>
                 </a:solidFill>
                 <a:latin typeface="Amiri" pitchFamily="2" charset="-78"/>
+                <a:ea typeface="Amiri" pitchFamily="2" charset="-78"/>
                 <a:cs typeface="Amiri" pitchFamily="2" charset="-78"/>
               </a:rPr>
               <a:t>م</a:t>
@@ -4477,6 +4502,7 @@
                   <a:srgbClr val="8A6D1E"/>
                 </a:solidFill>
                 <a:latin typeface="Amiri" pitchFamily="2" charset="-78"/>
+                <a:ea typeface="Amiri" pitchFamily="2" charset="-78"/>
                 <a:cs typeface="Amiri" pitchFamily="2" charset="-78"/>
               </a:rPr>
               <a:t>نَمُوذَجُ الإِجَابَةِ</a:t>
@@ -4590,6 +4616,7 @@
                   <a:srgbClr val="1F2A37"/>
                 </a:solidFill>
                 <a:latin typeface="Amiri" pitchFamily="2" charset="-78"/>
+                <a:ea typeface="Amiri" pitchFamily="2" charset="-78"/>
                 <a:cs typeface="Amiri" pitchFamily="2" charset="-78"/>
               </a:rPr>
               <a:t>عَزِيزَتِي نَادِيَةُ،</a:t>
@@ -4609,6 +4636,7 @@
                   <a:srgbClr val="1F2A37"/>
                 </a:solidFill>
                 <a:latin typeface="Amiri" pitchFamily="2" charset="-78"/>
+                <a:ea typeface="Amiri" pitchFamily="2" charset="-78"/>
                 <a:cs typeface="Amiri" pitchFamily="2" charset="-78"/>
               </a:rPr>
               <a:t>تَحِيَّةً طَيِّبَةً، وَبَعْدُ، فَعِنْدِي خَبَرٌ جَمِيلٌ: انْتَقَلَتْ أُسْرَةٌ مَغْرِبِيَّةٌ إِلَى البَيْتِ المُجَاوِرِ لَنَا، الَّذِي بَقِيَ فَارِغًا سَنَةً كَامِلَةً. تَتَكَوَّنُ الأُسْرَةُ مِنْ أَبٍ يَعْمَلُ طَبِيبًا، وَأُمٍّ لَطِيفَةٍ، وَبِنْتَيْنِ. أَمَّا الكُبْرَى، لَيْلَى، فَهِيَ فِي عُمْرِي تَقْرِيبًا؛ طَوِيلَةٌ، شَعْرُهَا أَسْوَدُ مُجَعَّدٌ، وَتَبْدُو خَجُولَةً قَلِيلًا، لٰكِنَّهَا ضَحِكَتْ كَثِيرًا عِنْدَمَا عَرَفَتْ أَنَّنَا نُحِبُّ الرَّسْمَ كِلْتَانَا. أَمْسِ قَضَيْتُ المَسَاءَ أُسَاعِدُهُمْ فِي تَرْتِيبِ غُرْفَتِهَا، ثُمَّ قَدَّمَتْ لَنَا أُمُّهَا شَايًا بِالنَّعْنَاعِ لَذِيذًا. سَنَدْعُوهُمْ إِلَى العَشَاءِ يَوْمَ الجُمُعَةِ، وَسَتَطْبُخُ أُمِّي المَقْلُوبَةَ، وَإِذَا جِئْتِ، فَسَتَتَعَرَّفِينَ عَلَيْهَا!</a:t>
@@ -4628,6 +4656,7 @@
                   <a:srgbClr val="1F2A37"/>
                 </a:solidFill>
                 <a:latin typeface="Amiri" pitchFamily="2" charset="-78"/>
+                <a:ea typeface="Amiri" pitchFamily="2" charset="-78"/>
                 <a:cs typeface="Amiri" pitchFamily="2" charset="-78"/>
               </a:rPr>
               <a:t>مَعَ مَحَبَّتِي،</a:t>
@@ -4647,6 +4676,7 @@
                   <a:srgbClr val="1F2A37"/>
                 </a:solidFill>
                 <a:latin typeface="Amiri" pitchFamily="2" charset="-78"/>
+                <a:ea typeface="Amiri" pitchFamily="2" charset="-78"/>
                 <a:cs typeface="Amiri" pitchFamily="2" charset="-78"/>
               </a:rPr>
               <a:t>مَرْيَمُ</a:t>
@@ -4810,11 +4840,12 @@
               <a:buNone/>
             </a:pPr>
             <a:r>
-              <a:rPr lang="en-US" sz="950" b="1" dirty="0">
+              <a:rPr lang="ar-SA" sz="950" b="1" dirty="0">
                 <a:solidFill>
                   <a:srgbClr val="FFFFFF"/>
                 </a:solidFill>
                 <a:latin typeface="Calibri" pitchFamily="34" charset="0"/>
+                <a:ea typeface="Amiri" pitchFamily="2" charset="-78"/>
                 <a:cs typeface="Amiri" pitchFamily="2" charset="-78"/>
               </a:rPr>
               <a:t>الَّذِي بَقِيَ فَارِغًا</a:t>
@@ -4875,11 +4906,12 @@
               <a:buNone/>
             </a:pPr>
             <a:r>
-              <a:rPr lang="en-US" sz="950" b="1" dirty="0">
+              <a:rPr lang="ar-SA" sz="950" b="1" dirty="0">
                 <a:solidFill>
                   <a:srgbClr val="FFFFFF"/>
                 </a:solidFill>
                 <a:latin typeface="Calibri" pitchFamily="34" charset="0"/>
+                <a:ea typeface="Amiri" pitchFamily="2" charset="-78"/>
                 <a:cs typeface="Amiri" pitchFamily="2" charset="-78"/>
               </a:rPr>
               <a:t>أَمَّا الكُبْرَى … فَهِيَ</a:t>
@@ -4940,11 +4972,12 @@
               <a:buNone/>
             </a:pPr>
             <a:r>
-              <a:rPr lang="en-US" sz="950" b="1" dirty="0">
+              <a:rPr lang="ar-SA" sz="950" b="1" dirty="0">
                 <a:solidFill>
                   <a:srgbClr val="FFFFFF"/>
                 </a:solidFill>
                 <a:latin typeface="Calibri" pitchFamily="34" charset="0"/>
+                <a:ea typeface="Amiri" pitchFamily="2" charset="-78"/>
                 <a:cs typeface="Amiri" pitchFamily="2" charset="-78"/>
               </a:rPr>
               <a:t>تَبْدُو خَجُولَةً</a:t>
@@ -5005,11 +5038,12 @@
               <a:buNone/>
             </a:pPr>
             <a:r>
-              <a:rPr lang="en-US" sz="950" b="1" dirty="0">
+              <a:rPr lang="ar-SA" sz="950" b="1" dirty="0">
                 <a:solidFill>
                   <a:srgbClr val="FFFFFF"/>
                 </a:solidFill>
                 <a:latin typeface="Calibri" pitchFamily="34" charset="0"/>
+                <a:ea typeface="Amiri" pitchFamily="2" charset="-78"/>
                 <a:cs typeface="Amiri" pitchFamily="2" charset="-78"/>
               </a:rPr>
               <a:t>إِذَا جِئْتِ، فَسَتَتَعَرَّفِينَ</a:t>
@@ -5143,6 +5177,7 @@
                   <a:srgbClr val="D4AF37"/>
                 </a:solidFill>
                 <a:latin typeface="Amiri" pitchFamily="2" charset="-78"/>
+                <a:ea typeface="Amiri" pitchFamily="2" charset="-78"/>
                 <a:cs typeface="Amiri" pitchFamily="2" charset="-78"/>
               </a:rPr>
               <a:t>م</a:t>
@@ -5463,6 +5498,7 @@
                   <a:srgbClr val="8A6D1E"/>
                 </a:solidFill>
                 <a:latin typeface="Amiri" pitchFamily="2" charset="-78"/>
+                <a:ea typeface="Amiri" pitchFamily="2" charset="-78"/>
                 <a:cs typeface="Amiri" pitchFamily="2" charset="-78"/>
               </a:rPr>
               <a:t>اخْتَرْ عُنْوَانًا وَاحِدًا</a:t>
@@ -5743,6 +5779,7 @@
                   <a:srgbClr val="1B3B6F"/>
                 </a:solidFill>
                 <a:latin typeface="Amiri" pitchFamily="2" charset="-78"/>
+                <a:ea typeface="Amiri" pitchFamily="2" charset="-78"/>
                 <a:cs typeface="Amiri" pitchFamily="2" charset="-78"/>
               </a:rPr>
               <a:t>جِيرَانِي</a:t>
@@ -5781,6 +5818,7 @@
                   <a:srgbClr val="1B3B6F"/>
                 </a:solidFill>
                 <a:latin typeface="Amiri" pitchFamily="2" charset="-78"/>
+                <a:ea typeface="Amiri" pitchFamily="2" charset="-78"/>
                 <a:cs typeface="Amiri" pitchFamily="2" charset="-78"/>
               </a:rPr>
               <a:t>(أ)</a:t>
@@ -5887,6 +5925,7 @@
                   <a:srgbClr val="1B3B6F"/>
                 </a:solidFill>
                 <a:latin typeface="Amiri" pitchFamily="2" charset="-78"/>
+                <a:ea typeface="Amiri" pitchFamily="2" charset="-78"/>
                 <a:cs typeface="Amiri" pitchFamily="2" charset="-78"/>
               </a:rPr>
               <a:t>صِفْ شَارِعَكَ وَبَيْتَكَ · مَنْ جِيرَانُكَ؟ (الشَّكْلُ وَالشَّخْصِيَّةُ وَالهِوَايَاتُ) · مَوْقِفٌ مَعَ الجِيرَانِ لَا تَنْسَاهُ · رَأْيُكَ وَخُطَطُكَ</a:t>
@@ -6018,6 +6057,7 @@
                   <a:srgbClr val="1B3B6F"/>
                 </a:solidFill>
                 <a:latin typeface="Amiri" pitchFamily="2" charset="-78"/>
+                <a:ea typeface="Amiri" pitchFamily="2" charset="-78"/>
                 <a:cs typeface="Amiri" pitchFamily="2" charset="-78"/>
               </a:rPr>
               <a:t>الجِيرَانُ فِي عَصْرِ المُدُنِ الكَبِيرَةِ</a:t>
@@ -6056,6 +6096,7 @@
                   <a:srgbClr val="1B3B6F"/>
                 </a:solidFill>
                 <a:latin typeface="Amiri" pitchFamily="2" charset="-78"/>
+                <a:ea typeface="Amiri" pitchFamily="2" charset="-78"/>
                 <a:cs typeface="Amiri" pitchFamily="2" charset="-78"/>
               </a:rPr>
               <a:t>(ب)</a:t>
@@ -6159,6 +6200,7 @@
                   <a:srgbClr val="1B3B6F"/>
                 </a:solidFill>
                 <a:latin typeface="Amiri" pitchFamily="2" charset="-78"/>
+                <a:ea typeface="Amiri" pitchFamily="2" charset="-78"/>
                 <a:cs typeface="Amiri" pitchFamily="2" charset="-78"/>
               </a:rPr>
               <a:t>هَلْ نَعْرِفُ جِيرَانَنَا؟ · المَاضِي وَالحَاضِرُ · مُبَادَرَةٌ أَوْ تَجْرِبَةٌ · رَأْيُكَ وَاقْتِرَاحُكَ</a:t>
@@ -6358,6 +6400,7 @@
                   <a:srgbClr val="D4AF37"/>
                 </a:solidFill>
                 <a:latin typeface="Amiri" pitchFamily="2" charset="-78"/>
+                <a:ea typeface="Amiri" pitchFamily="2" charset="-78"/>
                 <a:cs typeface="Amiri" pitchFamily="2" charset="-78"/>
               </a:rPr>
               <a:t>م</a:t>
@@ -6678,6 +6721,7 @@
                   <a:srgbClr val="8A6D1E"/>
                 </a:solidFill>
                 <a:latin typeface="Amiri" pitchFamily="2" charset="-78"/>
+                <a:ea typeface="Amiri" pitchFamily="2" charset="-78"/>
                 <a:cs typeface="Amiri" pitchFamily="2" charset="-78"/>
               </a:rPr>
               <a:t>خُطَّةُ الكِتَابَةِ</a:t>
@@ -7302,6 +7346,7 @@
                   <a:srgbClr val="1B3B6F"/>
                 </a:solidFill>
                 <a:latin typeface="Amiri" pitchFamily="2" charset="-78"/>
+                <a:ea typeface="Amiri" pitchFamily="2" charset="-78"/>
                 <a:cs typeface="Amiri" pitchFamily="2" charset="-78"/>
               </a:rPr>
               <a:t>جَارَتُنَا عَجُوزٌ لَطِيفَةٌ، شَعْرُهَا أَبْيَضُ.</a:t>
@@ -7401,6 +7446,7 @@
                   <a:srgbClr val="1B3B6F"/>
                 </a:solidFill>
                 <a:latin typeface="Amiri" pitchFamily="2" charset="-78"/>
+                <a:ea typeface="Amiri" pitchFamily="2" charset="-78"/>
                 <a:cs typeface="Amiri" pitchFamily="2" charset="-78"/>
               </a:rPr>
               <a:t>أَوَّلًا اشْتَرَيْتُ لَهَا الدَّوَاءَ، ثُمَّ …</a:t>
@@ -7500,6 +7546,7 @@
                   <a:srgbClr val="1B3B6F"/>
                 </a:solidFill>
                 <a:latin typeface="Amiri" pitchFamily="2" charset="-78"/>
+                <a:ea typeface="Amiri" pitchFamily="2" charset="-78"/>
                 <a:cs typeface="Amiri" pitchFamily="2" charset="-78"/>
               </a:rPr>
               <a:t>سَنَدْعُو كُلَّ الجِيرَانِ.</a:t>
@@ -7661,6 +7708,7 @@
                   <a:srgbClr val="1F2A37"/>
                 </a:solidFill>
                 <a:latin typeface="Amiri" pitchFamily="2" charset="-78"/>
+                <a:ea typeface="Amiri" pitchFamily="2" charset="-78"/>
                 <a:cs typeface="Amiri" pitchFamily="2" charset="-78"/>
               </a:rPr>
               <a:t>أ</a:t>
@@ -7687,6 +7735,7 @@
                   <a:srgbClr val="1F2A37"/>
                 </a:solidFill>
                 <a:latin typeface="Amiri" pitchFamily="2" charset="-78"/>
+                <a:ea typeface="Amiri" pitchFamily="2" charset="-78"/>
                 <a:cs typeface="Amiri" pitchFamily="2" charset="-78"/>
               </a:rPr>
               <a:t>ب</a:t>
@@ -7833,6 +7882,7 @@
                   <a:srgbClr val="D4AF37"/>
                 </a:solidFill>
                 <a:latin typeface="Amiri" pitchFamily="2" charset="-78"/>
+                <a:ea typeface="Amiri" pitchFamily="2" charset="-78"/>
                 <a:cs typeface="Amiri" pitchFamily="2" charset="-78"/>
               </a:rPr>
               <a:t>م</a:t>
@@ -8090,6 +8140,7 @@
                   <a:srgbClr val="8A6D1E"/>
                 </a:solidFill>
                 <a:latin typeface="Amiri" pitchFamily="2" charset="-78"/>
+                <a:ea typeface="Amiri" pitchFamily="2" charset="-78"/>
                 <a:cs typeface="Amiri" pitchFamily="2" charset="-78"/>
               </a:rPr>
               <a:t>أ</a:t>
@@ -8154,6 +8205,7 @@
                   <a:srgbClr val="1B3B6F"/>
                 </a:solidFill>
                 <a:latin typeface="Amiri" pitchFamily="2" charset="-78"/>
+                <a:ea typeface="Amiri" pitchFamily="2" charset="-78"/>
                 <a:cs typeface="Amiri" pitchFamily="2" charset="-78"/>
               </a:rPr>
               <a:t>أ</a:t>
@@ -8205,6 +8257,7 @@
                   <a:srgbClr val="8A6D1E"/>
                 </a:solidFill>
                 <a:latin typeface="Amiri" pitchFamily="2" charset="-78"/>
+                <a:ea typeface="Amiri" pitchFamily="2" charset="-78"/>
                 <a:cs typeface="Amiri" pitchFamily="2" charset="-78"/>
               </a:rPr>
               <a:t>نَمُوذَجُ الإِجَابَةِ</a:t>
@@ -8318,6 +8371,7 @@
                   <a:srgbClr val="1F2A37"/>
                 </a:solidFill>
                 <a:latin typeface="Amiri" pitchFamily="2" charset="-78"/>
+                <a:ea typeface="Amiri" pitchFamily="2" charset="-78"/>
                 <a:cs typeface="Amiri" pitchFamily="2" charset="-78"/>
               </a:rPr>
               <a:t>أَسْكُنُ فِي شَارِعٍ هَادِئٍ فِي شَمَالِ مَانْشِسْتَرَ. فِي شَارِعِنَا خَمْسَةَ عَشَرَ بَيْتًا، وَأَغْلَبُ البُيُوتِ قَدِيمَةٌ وَمَصْنُوعَةٌ مِنَ الطُّوبِ الأَحْمَرِ. بَيْتُنَا أَبْيَضُ، وَلَهُ حَدِيقَةٌ صَغِيرَةٌ أَمَامَهُ، فِيهَا أَزْهَارٌ حَمْرَاءُ وَصَفْرَاءُ.</a:t>
@@ -8337,6 +8391,7 @@
                   <a:srgbClr val="1F2A37"/>
                 </a:solidFill>
                 <a:latin typeface="Amiri" pitchFamily="2" charset="-78"/>
+                <a:ea typeface="Amiri" pitchFamily="2" charset="-78"/>
                 <a:cs typeface="Amiri" pitchFamily="2" charset="-78"/>
               </a:rPr>
               <a:t>جِيرَانُنَا مِنْ بُلْدَانٍ كَثِيرَةٍ. عَلَى اليَمِينِ تَسْكُنُ أُسْرَةٌ صُومَالِيَّةٌ، عِنْدَهُمْ أَرْبَعَةُ أَوْلَادٍ، وَأَلْعَبُ كُرَةَ القَدَمِ مَعَ ابْنِهِمُ الكَبِيرِ كُلَّ سَبْتٍ. عَلَى اليَسَارِ تَسْكُنُ جَارَتُنَا مَارْغَرِيتُ، وَهِيَ عَجُوزٌ لَطِيفَةٌ، شَعْرُهَا أَبْيَضُ، وَتُحِبُّ الزُّهُورَ، وَتَعِيشُ وَحْدَهَا مَعَ قِطَّتِهَا البَيْضَاءِ.</a:t>
@@ -8356,6 +8411,7 @@
                   <a:srgbClr val="1F2A37"/>
                 </a:solidFill>
                 <a:latin typeface="Amiri" pitchFamily="2" charset="-78"/>
+                <a:ea typeface="Amiri" pitchFamily="2" charset="-78"/>
                 <a:cs typeface="Amiri" pitchFamily="2" charset="-78"/>
               </a:rPr>
               <a:t>فِي الشِّتَاءِ المَاضِي مَرِضَتْ مَارْغَرِيتُ. أَوَّلًا ذَهَبْتُ إِلَى الصَّيْدَلِيَّةِ وَاشْتَرَيْتُ لَهَا الدَّوَاءَ، ثُمَّ طَبَخَتْ أُمِّي لَهَا الشُّورْبَةَ. كَانَتْ سَعِيدَةً جِدًّا، وَأَعْطَتْنِي كِتَابًا قَدِيمًا هَدِيَّةً. الآنَ أَزُورُهَا كُلَّ أُسْبُوعٍ.</a:t>
@@ -8375,6 +8431,7 @@
                   <a:srgbClr val="1F2A37"/>
                 </a:solidFill>
                 <a:latin typeface="Amiri" pitchFamily="2" charset="-78"/>
+                <a:ea typeface="Amiri" pitchFamily="2" charset="-78"/>
                 <a:cs typeface="Amiri" pitchFamily="2" charset="-78"/>
               </a:rPr>
               <a:t>فِي رَأْيِي، الجِيرَانُ مُهِمُّونَ جِدًّا، لِأَنَّهُمْ يُسَاعِدُونَنَا. فِي الصَّيْفِ القَادِمِ سَنُنَظِّمُ حَفْلَةً فِي الشَّارِعِ، وَسَنَدْعُو كُلَّ الجِيرَانِ.</a:t>
@@ -8538,11 +8595,12 @@
               <a:buNone/>
             </a:pPr>
             <a:r>
-              <a:rPr lang="en-US" sz="950" b="1" dirty="0">
+              <a:rPr lang="ar-SA" sz="950" b="1" dirty="0">
                 <a:solidFill>
                   <a:srgbClr val="FFFFFF"/>
                 </a:solidFill>
                 <a:latin typeface="Calibri" pitchFamily="34" charset="0"/>
+                <a:ea typeface="Amiri" pitchFamily="2" charset="-78"/>
                 <a:cs typeface="Amiri" pitchFamily="2" charset="-78"/>
               </a:rPr>
               <a:t>خَمْسَةَ عَشَرَ بَيْتًا</a:t>
@@ -8603,11 +8661,12 @@
               <a:buNone/>
             </a:pPr>
             <a:r>
-              <a:rPr lang="en-US" sz="950" b="1" dirty="0">
+              <a:rPr lang="ar-SA" sz="950" b="1" dirty="0">
                 <a:solidFill>
                   <a:srgbClr val="FFFFFF"/>
                 </a:solidFill>
                 <a:latin typeface="Calibri" pitchFamily="34" charset="0"/>
+                <a:ea typeface="Amiri" pitchFamily="2" charset="-78"/>
                 <a:cs typeface="Amiri" pitchFamily="2" charset="-78"/>
               </a:rPr>
               <a:t>عِنْدَهُمْ أَرْبَعَةُ أَوْلَادٍ</a:t>
@@ -8668,11 +8727,12 @@
               <a:buNone/>
             </a:pPr>
             <a:r>
-              <a:rPr lang="en-US" sz="950" b="1" dirty="0">
+              <a:rPr lang="ar-SA" sz="950" b="1" dirty="0">
                 <a:solidFill>
                   <a:srgbClr val="FFFFFF"/>
                 </a:solidFill>
                 <a:latin typeface="Calibri" pitchFamily="34" charset="0"/>
+                <a:ea typeface="Amiri" pitchFamily="2" charset="-78"/>
                 <a:cs typeface="Amiri" pitchFamily="2" charset="-78"/>
               </a:rPr>
               <a:t>أَوَّلًا … ثُمَّ</a:t>
@@ -8733,11 +8793,12 @@
               <a:buNone/>
             </a:pPr>
             <a:r>
-              <a:rPr lang="en-US" sz="950" b="1" dirty="0">
+              <a:rPr lang="ar-SA" sz="950" b="1" dirty="0">
                 <a:solidFill>
                   <a:srgbClr val="FFFFFF"/>
                 </a:solidFill>
                 <a:latin typeface="Calibri" pitchFamily="34" charset="0"/>
+                <a:ea typeface="Amiri" pitchFamily="2" charset="-78"/>
                 <a:cs typeface="Amiri" pitchFamily="2" charset="-78"/>
               </a:rPr>
               <a:t>سَنَدْعُو</a:t>
@@ -8871,6 +8932,7 @@
                   <a:srgbClr val="D4AF37"/>
                 </a:solidFill>
                 <a:latin typeface="Amiri" pitchFamily="2" charset="-78"/>
+                <a:ea typeface="Amiri" pitchFamily="2" charset="-78"/>
                 <a:cs typeface="Amiri" pitchFamily="2" charset="-78"/>
               </a:rPr>
               <a:t>م</a:t>
@@ -9128,6 +9190,7 @@
                   <a:srgbClr val="8A6D1E"/>
                 </a:solidFill>
                 <a:latin typeface="Amiri" pitchFamily="2" charset="-78"/>
+                <a:ea typeface="Amiri" pitchFamily="2" charset="-78"/>
                 <a:cs typeface="Amiri" pitchFamily="2" charset="-78"/>
               </a:rPr>
               <a:t>أ</a:t>
@@ -9192,6 +9255,7 @@
                   <a:srgbClr val="1B3B6F"/>
                 </a:solidFill>
                 <a:latin typeface="Amiri" pitchFamily="2" charset="-78"/>
+                <a:ea typeface="Amiri" pitchFamily="2" charset="-78"/>
                 <a:cs typeface="Amiri" pitchFamily="2" charset="-78"/>
               </a:rPr>
               <a:t>أ</a:t>
@@ -9243,6 +9307,7 @@
                   <a:srgbClr val="8A6D1E"/>
                 </a:solidFill>
                 <a:latin typeface="Amiri" pitchFamily="2" charset="-78"/>
+                <a:ea typeface="Amiri" pitchFamily="2" charset="-78"/>
                 <a:cs typeface="Amiri" pitchFamily="2" charset="-78"/>
               </a:rPr>
               <a:t>نَمُوذَجُ الإِجَابَةِ</a:t>
@@ -9356,6 +9421,7 @@
                   <a:srgbClr val="1F2A37"/>
                 </a:solidFill>
                 <a:latin typeface="Amiri" pitchFamily="2" charset="-78"/>
+                <a:ea typeface="Amiri" pitchFamily="2" charset="-78"/>
                 <a:cs typeface="Amiri" pitchFamily="2" charset="-78"/>
               </a:rPr>
               <a:t>يَقُولُ المَثَلُ العَرَبِيُّ: «الجَارُ قَبْلَ الدَّارِ»، وَلَمْ أَفْهَمْ مَعْنَاهُ حَتَّى انْتَقَلْنَا إِلَى حَيِّنَا الحَالِيِّ قَبْلَ ثَلَاثِ سَنَوَاتٍ. بَيْتُنَا لَيْسَ كَبِيرًا، وَمَطْبَخُهُ ضَيِّقٌ، لٰكِنَّ جِيرَانَنَا جَعَلُوهُ أَجْمَلَ بَيْتٍ فِي العَالَمِ، وَأَصْبَحُوا جُزْءًا مِنْ حَيَاتِنَا اليَوْمِيَّةِ.</a:t>
@@ -9375,6 +9441,7 @@
                   <a:srgbClr val="1F2A37"/>
                 </a:solidFill>
                 <a:latin typeface="Amiri" pitchFamily="2" charset="-78"/>
+                <a:ea typeface="Amiri" pitchFamily="2" charset="-78"/>
                 <a:cs typeface="Amiri" pitchFamily="2" charset="-78"/>
               </a:rPr>
               <a:t>عَلَى يَمِينِنَا تَسْكُنُ أُسْرَةٌ سُورِيَّةٌ؛ الأَبُ نَجَّارٌ مَاهِرٌ صَنَعَ لِي رَفًّا لِكُتُبِي، أَمَّا الأُمُّ فَتُرْسِلُ لَنَا كُلَّ جُمُعَةٍ طَبَقًا مِنَ الكُبَّةِ. وَعَلَى يَسَارِنَا جَارٌ إِنْجِلِيزِيٌّ عَجُوزٌ، يَبْدُو صَارِمًا، لٰكِنَّهُ يَحْكِي لَنَا قِصَصًا مُضْحِكَةً عَنْ شَبَابِهِ، وَيُعَلِّمُ أَخِيَ الصَّغِيرَ الشِّطْرَنْجَ كُلَّ أَحَدٍ.</a:t>
@@ -9394,6 +9461,7 @@
                   <a:srgbClr val="1F2A37"/>
                 </a:solidFill>
                 <a:latin typeface="Amiri" pitchFamily="2" charset="-78"/>
+                <a:ea typeface="Amiri" pitchFamily="2" charset="-78"/>
                 <a:cs typeface="Amiri" pitchFamily="2" charset="-78"/>
               </a:rPr>
               <a:t>لَنْ أَنْسَى يَوْمَ وَصَلْنَا؛ كَانَ المَطَرُ شَدِيدًا، وَالأَثَاثُ مُبْتَلًّا فِي الشَّارِعِ، فَخَرَجَ الجِيرَانُ كُلُّهُمْ دُونَ أَنْ نَطْلُبَ، وَحَمَلُوا الصَّنَادِيقَ مَعَنَا حَتَّى آخِرِ قِطْعَةٍ، ثُمَّ دَعَوْنَا إِلَى العَشَاءِ.</a:t>
@@ -9413,6 +9481,7 @@
                   <a:srgbClr val="1F2A37"/>
                 </a:solidFill>
                 <a:latin typeface="Amiri" pitchFamily="2" charset="-78"/>
+                <a:ea typeface="Amiri" pitchFamily="2" charset="-78"/>
                 <a:cs typeface="Amiri" pitchFamily="2" charset="-78"/>
               </a:rPr>
               <a:t>صَحِيحٌ أَنَّ لِكُلِّ بَيْتٍ خُصُوصِيَّتَهُ، غَيْرَ أَنَّ الحَيَّ يُصْبِحُ عَائِلَةً كَبِيرَةً عِنْدَمَا يَهْتَمُّ النَّاسُ بِبَعْضِهِمْ. وَإِذَا جَاءَ جِيرَانٌ جُدُدٌ إِلَى شَارِعِنَا، فَسَأَكُونُ أَوَّلَ مَنْ يَطْرُقُ بَابَهُمْ لِيُرَحِّبَ بِهِمْ.</a:t>
@@ -9511,11 +9580,12 @@
               <a:buNone/>
             </a:pPr>
             <a:r>
-              <a:rPr lang="en-US" sz="950" b="1" dirty="0">
+              <a:rPr lang="ar-SA" sz="950" b="1" dirty="0">
                 <a:solidFill>
                   <a:srgbClr val="FFFFFF"/>
                 </a:solidFill>
                 <a:latin typeface="Calibri" pitchFamily="34" charset="0"/>
+                <a:ea typeface="Amiri" pitchFamily="2" charset="-78"/>
                 <a:cs typeface="Amiri" pitchFamily="2" charset="-78"/>
               </a:rPr>
               <a:t>لَمْ أَفْهَمْ … حَتَّى</a:t>
@@ -9576,11 +9646,12 @@
               <a:buNone/>
             </a:pPr>
             <a:r>
-              <a:rPr lang="en-US" sz="950" b="1" dirty="0">
+              <a:rPr lang="ar-SA" sz="950" b="1" dirty="0">
                 <a:solidFill>
                   <a:srgbClr val="FFFFFF"/>
                 </a:solidFill>
                 <a:latin typeface="Calibri" pitchFamily="34" charset="0"/>
+                <a:ea typeface="Amiri" pitchFamily="2" charset="-78"/>
                 <a:cs typeface="Amiri" pitchFamily="2" charset="-78"/>
               </a:rPr>
               <a:t>أَمَّا الأُمُّ فَتُرْسِلُ</a:t>
@@ -9641,11 +9712,12 @@
               <a:buNone/>
             </a:pPr>
             <a:r>
-              <a:rPr lang="en-US" sz="950" b="1" dirty="0">
+              <a:rPr lang="ar-SA" sz="950" b="1" dirty="0">
                 <a:solidFill>
                   <a:srgbClr val="FFFFFF"/>
                 </a:solidFill>
                 <a:latin typeface="Calibri" pitchFamily="34" charset="0"/>
+                <a:ea typeface="Amiri" pitchFamily="2" charset="-78"/>
                 <a:cs typeface="Amiri" pitchFamily="2" charset="-78"/>
               </a:rPr>
               <a:t>دُونَ أَنْ نَطْلُبَ</a:t>
@@ -9706,11 +9778,12 @@
               <a:buNone/>
             </a:pPr>
             <a:r>
-              <a:rPr lang="en-US" sz="950" b="1" dirty="0">
+              <a:rPr lang="ar-SA" sz="950" b="1" dirty="0">
                 <a:solidFill>
                   <a:srgbClr val="FFFFFF"/>
                 </a:solidFill>
                 <a:latin typeface="Calibri" pitchFamily="34" charset="0"/>
+                <a:ea typeface="Amiri" pitchFamily="2" charset="-78"/>
                 <a:cs typeface="Amiri" pitchFamily="2" charset="-78"/>
               </a:rPr>
               <a:t>إِذَا جَاءَ … فَسَأَكُونُ</a:t>
@@ -9844,6 +9917,7 @@
                   <a:srgbClr val="D4AF37"/>
                 </a:solidFill>
                 <a:latin typeface="Amiri" pitchFamily="2" charset="-78"/>
+                <a:ea typeface="Amiri" pitchFamily="2" charset="-78"/>
                 <a:cs typeface="Amiri" pitchFamily="2" charset="-78"/>
               </a:rPr>
               <a:t>م</a:t>
@@ -10101,6 +10175,7 @@
                   <a:srgbClr val="8A6D1E"/>
                 </a:solidFill>
                 <a:latin typeface="Amiri" pitchFamily="2" charset="-78"/>
+                <a:ea typeface="Amiri" pitchFamily="2" charset="-78"/>
                 <a:cs typeface="Amiri" pitchFamily="2" charset="-78"/>
               </a:rPr>
               <a:t>ب</a:t>
@@ -10165,6 +10240,7 @@
                   <a:srgbClr val="1B3B6F"/>
                 </a:solidFill>
                 <a:latin typeface="Amiri" pitchFamily="2" charset="-78"/>
+                <a:ea typeface="Amiri" pitchFamily="2" charset="-78"/>
                 <a:cs typeface="Amiri" pitchFamily="2" charset="-78"/>
               </a:rPr>
               <a:t>ب</a:t>
@@ -10216,6 +10292,7 @@
                   <a:srgbClr val="8A6D1E"/>
                 </a:solidFill>
                 <a:latin typeface="Amiri" pitchFamily="2" charset="-78"/>
+                <a:ea typeface="Amiri" pitchFamily="2" charset="-78"/>
                 <a:cs typeface="Amiri" pitchFamily="2" charset="-78"/>
               </a:rPr>
               <a:t>نَمُوذَجُ الإِجَابَةِ</a:t>
@@ -10329,6 +10406,7 @@
                   <a:srgbClr val="1F2A37"/>
                 </a:solidFill>
                 <a:latin typeface="Amiri" pitchFamily="2" charset="-78"/>
+                <a:ea typeface="Amiri" pitchFamily="2" charset="-78"/>
                 <a:cs typeface="Amiri" pitchFamily="2" charset="-78"/>
               </a:rPr>
               <a:t>فِي المُدُنِ الحَدِيثَةِ يَسْكُنُ النَّاسُ قَرِيبِينَ جِدًّا بَعْضُهُمْ مِنْ بَعْضٍ؛ فَقَدْ يَفْصِلُ بَيْنَكَ وَبَيْنَ جَارِكَ جِدَارٌ وَاحِدٌ، وَمَعَ ذٰلِكَ لَا تَعْرِفُ اسْمَهُ، وَلَا تَعْرِفُ إِنْ كَانَ مَرِيضًا أَوْ يَحْتَاجُ إِلَى مُسَاعَدَةٍ.</a:t>
@@ -10348,6 +10426,7 @@
                   <a:srgbClr val="1F2A37"/>
                 </a:solidFill>
                 <a:latin typeface="Amiri" pitchFamily="2" charset="-78"/>
+                <a:ea typeface="Amiri" pitchFamily="2" charset="-78"/>
                 <a:cs typeface="Amiri" pitchFamily="2" charset="-78"/>
               </a:rPr>
               <a:t>فِي المَاضِي كَانَ الجِيرَانُ يَتَبَادَلُونَ الطَّعَامَ وَالزِّيَارَاتِ، وَيَحْتَفِلُونَ بِالأَعْيَادِ مَعًا، وَكَانَ الأَطْفَالُ يَلْعَبُونَ فِي الشَّارِعِ تَحْتَ أَعْيُنِ كُلِّ الأُمَّهَاتِ، أَمَّا اليَوْمَ فَيَقْضِي أَغْلَبُنَا وَقْتَهُ خَلْفَ الأَبْوَابِ المُغْلَقَةِ وَأَمَامَ الشَّاشَاتِ.</a:t>
@@ -10367,6 +10446,7 @@
                   <a:srgbClr val="1F2A37"/>
                 </a:solidFill>
                 <a:latin typeface="Amiri" pitchFamily="2" charset="-78"/>
+                <a:ea typeface="Amiri" pitchFamily="2" charset="-78"/>
                 <a:cs typeface="Amiri" pitchFamily="2" charset="-78"/>
               </a:rPr>
               <a:t>غَيْرَ أَنَّ التَّغْيِيرَ مُمْكِنٌ. فِي الصَّيْفِ المَاضِي اقْتَرَحَ أَبِي أَنْ نُنَظِّمَ «غَدَاءَ الشَّارِعِ»، فَأَحْضَرَتْ كُلُّ أُسْرَةٍ طَبَقًا مِنْ بَلَدِهَا: بِرْيَانِي بَاكِسْتَانِيٌّ، وَكُسْكُسِي مَغْرِبِيٌّ، وَفَطَائِرُ إِنْجِلِيزِيَّةٌ. وَمُنْذُ ذٰلِكَ اليَوْمِ أَصْبَحَ الجِيرَانُ يُسَلِّمُونَ عَلَى بَعْضِهِمْ وَيَتَعَاوَنُونَ، وَيَحْرُسُ بَعْضُهُمْ بُيُوتَ بَعْضٍ فِي العُطَلِ.</a:t>
@@ -10386,6 +10466,7 @@
                   <a:srgbClr val="1F2A37"/>
                 </a:solidFill>
                 <a:latin typeface="Amiri" pitchFamily="2" charset="-78"/>
+                <a:ea typeface="Amiri" pitchFamily="2" charset="-78"/>
                 <a:cs typeface="Amiri" pitchFamily="2" charset="-78"/>
               </a:rPr>
               <a:t>صَحِيحٌ أَنَّ الحَيَاةَ الحَدِيثَةَ سَرِيعَةٌ وَمُتْعِبَةٌ، غَيْرَ أَنَّ ابْتِسَامَةً وَسُؤَالًا بَسِيطًا يُمْكِنُ أَنْ يَبْنِيَا صَدَاقَةً. وَلَوْ خَصَّصَ كُلُّ حَيٍّ يَوْمًا وَاحِدًا فِي السَّنَةِ لِلِقَاءِ الجِيرَانِ، لَأَصْبَحَتْ مُدُنُنَا أَكْثَرَ دِفْئًا وَأَمَانًا.</a:t>
@@ -10484,11 +10565,12 @@
               <a:buNone/>
             </a:pPr>
             <a:r>
-              <a:rPr lang="en-US" sz="950" b="1" dirty="0">
+              <a:rPr lang="ar-SA" sz="950" b="1" dirty="0">
                 <a:solidFill>
                   <a:srgbClr val="FFFFFF"/>
                 </a:solidFill>
                 <a:latin typeface="Calibri" pitchFamily="34" charset="0"/>
+                <a:ea typeface="Amiri" pitchFamily="2" charset="-78"/>
                 <a:cs typeface="Amiri" pitchFamily="2" charset="-78"/>
               </a:rPr>
               <a:t>وَمَعَ ذٰلِكَ لَا تَعْرِفُ</a:t>
@@ -10549,11 +10631,12 @@
               <a:buNone/>
             </a:pPr>
             <a:r>
-              <a:rPr lang="en-US" sz="950" b="1" dirty="0">
+              <a:rPr lang="ar-SA" sz="950" b="1" dirty="0">
                 <a:solidFill>
                   <a:srgbClr val="FFFFFF"/>
                 </a:solidFill>
                 <a:latin typeface="Calibri" pitchFamily="34" charset="0"/>
+                <a:ea typeface="Amiri" pitchFamily="2" charset="-78"/>
                 <a:cs typeface="Amiri" pitchFamily="2" charset="-78"/>
               </a:rPr>
               <a:t>أَمَّا اليَوْمَ فَيَقْضِي</a:t>
@@ -10614,11 +10697,12 @@
               <a:buNone/>
             </a:pPr>
             <a:r>
-              <a:rPr lang="en-US" sz="950" b="1" dirty="0">
+              <a:rPr lang="ar-SA" sz="950" b="1" dirty="0">
                 <a:solidFill>
                   <a:srgbClr val="FFFFFF"/>
                 </a:solidFill>
                 <a:latin typeface="Calibri" pitchFamily="34" charset="0"/>
+                <a:ea typeface="Amiri" pitchFamily="2" charset="-78"/>
                 <a:cs typeface="Amiri" pitchFamily="2" charset="-78"/>
               </a:rPr>
               <a:t>اقْتَرَحَ أَبِي أَنْ نُنَظِّمَ</a:t>
@@ -10679,11 +10763,12 @@
               <a:buNone/>
             </a:pPr>
             <a:r>
-              <a:rPr lang="en-US" sz="950" b="1" dirty="0">
+              <a:rPr lang="ar-SA" sz="950" b="1" dirty="0">
                 <a:solidFill>
                   <a:srgbClr val="FFFFFF"/>
                 </a:solidFill>
                 <a:latin typeface="Calibri" pitchFamily="34" charset="0"/>
+                <a:ea typeface="Amiri" pitchFamily="2" charset="-78"/>
                 <a:cs typeface="Amiri" pitchFamily="2" charset="-78"/>
               </a:rPr>
               <a:t>لَوْ خَصَّصَ … لَأَصْبَحَتْ</a:t>
@@ -10817,6 +10902,7 @@
                   <a:srgbClr val="D4AF37"/>
                 </a:solidFill>
                 <a:latin typeface="Amiri" pitchFamily="2" charset="-78"/>
+                <a:ea typeface="Amiri" pitchFamily="2" charset="-78"/>
                 <a:cs typeface="Amiri" pitchFamily="2" charset="-78"/>
               </a:rPr>
               <a:t>م</a:t>
@@ -11137,6 +11223,7 @@
                   <a:srgbClr val="8A6D1E"/>
                 </a:solidFill>
                 <a:latin typeface="Amiri" pitchFamily="2" charset="-78"/>
+                <a:ea typeface="Amiri" pitchFamily="2" charset="-78"/>
                 <a:cs typeface="Amiri" pitchFamily="2" charset="-78"/>
               </a:rPr>
               <a:t>قَيِّمْ عَمَلَكَ</a:t>
@@ -12381,6 +12468,7 @@
                   <a:srgbClr val="FFFFFF"/>
                 </a:solidFill>
                 <a:latin typeface="Amiri" pitchFamily="2" charset="-78"/>
+                <a:ea typeface="Amiri" pitchFamily="2" charset="-78"/>
                 <a:cs typeface="Amiri" pitchFamily="2" charset="-78"/>
               </a:rPr>
               <a:t>أَحْسَنْتُمْ! إِلَى اللِّقَاءِ</a:t>
@@ -12533,6 +12621,7 @@
                   <a:srgbClr val="D4AF37"/>
                 </a:solidFill>
                 <a:latin typeface="Amiri" pitchFamily="2" charset="-78"/>
+                <a:ea typeface="Amiri" pitchFamily="2" charset="-78"/>
                 <a:cs typeface="Amiri" pitchFamily="2" charset="-78"/>
               </a:rPr>
               <a:t>وَرْشَةُ التَّدْرِيبِ</a:t>
@@ -12666,6 +12755,7 @@
                   <a:srgbClr val="D4AF37"/>
                 </a:solidFill>
                 <a:latin typeface="Amiri" pitchFamily="2" charset="-78"/>
+                <a:ea typeface="Amiri" pitchFamily="2" charset="-78"/>
                 <a:cs typeface="Amiri" pitchFamily="2" charset="-78"/>
               </a:rPr>
               <a:t>م</a:t>
@@ -12986,6 +13076,7 @@
                   <a:srgbClr val="8A6D1E"/>
                 </a:solidFill>
                 <a:latin typeface="Amiri" pitchFamily="2" charset="-78"/>
+                <a:ea typeface="Amiri" pitchFamily="2" charset="-78"/>
                 <a:cs typeface="Amiri" pitchFamily="2" charset="-78"/>
               </a:rPr>
               <a:t>آدَابُ الصَّفِّ</a:t>
@@ -14517,6 +14608,7 @@
                   <a:srgbClr val="D4AF37"/>
                 </a:solidFill>
                 <a:latin typeface="Amiri" pitchFamily="2" charset="-78"/>
+                <a:ea typeface="Amiri" pitchFamily="2" charset="-78"/>
                 <a:cs typeface="Amiri" pitchFamily="2" charset="-78"/>
               </a:rPr>
               <a:t>م</a:t>
@@ -14837,6 +14929,7 @@
                   <a:srgbClr val="8A6D1E"/>
                 </a:solidFill>
                 <a:latin typeface="Amiri" pitchFamily="2" charset="-78"/>
+                <a:ea typeface="Amiri" pitchFamily="2" charset="-78"/>
                 <a:cs typeface="Amiri" pitchFamily="2" charset="-78"/>
               </a:rPr>
               <a:t>خَرِيطَةُ الوَرْشَةِ</a:t>
@@ -15151,6 +15244,7 @@
                   <a:srgbClr val="1B3B6F"/>
                 </a:solidFill>
                 <a:latin typeface="Amiri" pitchFamily="2" charset="-78"/>
+                <a:ea typeface="Amiri" pitchFamily="2" charset="-78"/>
                 <a:cs typeface="Amiri" pitchFamily="2" charset="-78"/>
               </a:rPr>
               <a:t>كَيْفَ</a:t>
@@ -15427,6 +15521,7 @@
                   <a:srgbClr val="1E6B52"/>
                 </a:solidFill>
                 <a:latin typeface="Amiri" pitchFamily="2" charset="-78"/>
+                <a:ea typeface="Amiri" pitchFamily="2" charset="-78"/>
                 <a:cs typeface="Amiri" pitchFamily="2" charset="-78"/>
               </a:rPr>
               <a:t>الاسْتِمَارَةُ</a:t>
@@ -15703,6 +15798,7 @@
                   <a:srgbClr val="1E6B52"/>
                 </a:solidFill>
                 <a:latin typeface="Amiri" pitchFamily="2" charset="-78"/>
+                <a:ea typeface="Amiri" pitchFamily="2" charset="-78"/>
                 <a:cs typeface="Amiri" pitchFamily="2" charset="-78"/>
               </a:rPr>
               <a:t>الرِّسَالَةُ</a:t>
@@ -15979,6 +16075,7 @@
                   <a:srgbClr val="1E6B52"/>
                 </a:solidFill>
                 <a:latin typeface="Amiri" pitchFamily="2" charset="-78"/>
+                <a:ea typeface="Amiri" pitchFamily="2" charset="-78"/>
                 <a:cs typeface="Amiri" pitchFamily="2" charset="-78"/>
               </a:rPr>
               <a:t>المَقَالُ</a:t>
@@ -16255,6 +16352,7 @@
                   <a:srgbClr val="8A6D1E"/>
                 </a:solidFill>
                 <a:latin typeface="Amiri" pitchFamily="2" charset="-78"/>
+                <a:ea typeface="Amiri" pitchFamily="2" charset="-78"/>
                 <a:cs typeface="Amiri" pitchFamily="2" charset="-78"/>
               </a:rPr>
               <a:t>قَيِّمْ</a:t>
@@ -16498,6 +16596,7 @@
                   <a:srgbClr val="D4AF37"/>
                 </a:solidFill>
                 <a:latin typeface="Amiri" pitchFamily="2" charset="-78"/>
+                <a:ea typeface="Amiri" pitchFamily="2" charset="-78"/>
                 <a:cs typeface="Amiri" pitchFamily="2" charset="-78"/>
               </a:rPr>
               <a:t>م</a:t>
@@ -16818,6 +16917,7 @@
                   <a:srgbClr val="8A6D1E"/>
                 </a:solidFill>
                 <a:latin typeface="Amiri" pitchFamily="2" charset="-78"/>
+                <a:ea typeface="Amiri" pitchFamily="2" charset="-78"/>
                 <a:cs typeface="Amiri" pitchFamily="2" charset="-78"/>
               </a:rPr>
               <a:t>امْتِحَانُ الكِتَابَةِ</a:t>
@@ -17442,6 +17542,7 @@
                   <a:srgbClr val="1B3B6F"/>
                 </a:solidFill>
                 <a:latin typeface="Amiri" pitchFamily="2" charset="-78"/>
+                <a:ea typeface="Amiri" pitchFamily="2" charset="-78"/>
                 <a:cs typeface="Amiri" pitchFamily="2" charset="-78"/>
               </a:rPr>
               <a:t>انْتَقَلُوا إِلَى البَيْتِ الَّذِي بِجَانِبِ بَيْتِنَا</a:t>
@@ -17541,6 +17642,7 @@
                   <a:srgbClr val="1B3B6F"/>
                 </a:solidFill>
                 <a:latin typeface="Amiri" pitchFamily="2" charset="-78"/>
+                <a:ea typeface="Amiri" pitchFamily="2" charset="-78"/>
                 <a:cs typeface="Amiri" pitchFamily="2" charset="-78"/>
               </a:rPr>
               <a:t>تَبْدُو خَجُولَةً، لٰكِنَّهَا …</a:t>
@@ -17640,6 +17742,7 @@
                   <a:srgbClr val="1B3B6F"/>
                 </a:solidFill>
                 <a:latin typeface="Amiri" pitchFamily="2" charset="-78"/>
+                <a:ea typeface="Amiri" pitchFamily="2" charset="-78"/>
                 <a:cs typeface="Amiri" pitchFamily="2" charset="-78"/>
               </a:rPr>
               <a:t>سَنَدْعُوهُمْ إِلَى العَشَاءِ</a:t>
@@ -17811,6 +17914,7 @@
                   <a:srgbClr val="D4AF37"/>
                 </a:solidFill>
                 <a:latin typeface="Amiri" pitchFamily="2" charset="-78"/>
+                <a:ea typeface="Amiri" pitchFamily="2" charset="-78"/>
                 <a:cs typeface="Amiri" pitchFamily="2" charset="-78"/>
               </a:rPr>
               <a:t>م</a:t>
@@ -18131,6 +18235,7 @@
                   <a:srgbClr val="8A6D1E"/>
                 </a:solidFill>
                 <a:latin typeface="Amiri" pitchFamily="2" charset="-78"/>
+                <a:ea typeface="Amiri" pitchFamily="2" charset="-78"/>
                 <a:cs typeface="Amiri" pitchFamily="2" charset="-78"/>
               </a:rPr>
               <a:t>اسْتِمَارَةُ التَّرْحِيبِ بِالجِيرَانِ</a:t>
@@ -18487,6 +18592,7 @@
                   <a:srgbClr val="1B3B6F"/>
                 </a:solidFill>
                 <a:latin typeface="Amiri" pitchFamily="2" charset="-78"/>
+                <a:ea typeface="Amiri" pitchFamily="2" charset="-78"/>
                 <a:cs typeface="Amiri" pitchFamily="2" charset="-78"/>
               </a:rPr>
               <a:t>اسْمُ الأُسْرَةِ الجَدِيدَةِ</a:t>
@@ -18731,6 +18837,7 @@
                   <a:srgbClr val="1B3B6F"/>
                 </a:solidFill>
                 <a:latin typeface="Amiri" pitchFamily="2" charset="-78"/>
+                <a:ea typeface="Amiri" pitchFamily="2" charset="-78"/>
                 <a:cs typeface="Amiri" pitchFamily="2" charset="-78"/>
               </a:rPr>
               <a:t>رَقْمُ البَيْتِ</a:t>
@@ -18975,6 +19082,7 @@
                   <a:srgbClr val="1B3B6F"/>
                 </a:solidFill>
                 <a:latin typeface="Amiri" pitchFamily="2" charset="-78"/>
+                <a:ea typeface="Amiri" pitchFamily="2" charset="-78"/>
                 <a:cs typeface="Amiri" pitchFamily="2" charset="-78"/>
               </a:rPr>
               <a:t>مِنْ أَيْنَ هُمْ؟</a:t>
@@ -19219,6 +19327,7 @@
                   <a:srgbClr val="1B3B6F"/>
                 </a:solidFill>
                 <a:latin typeface="Amiri" pitchFamily="2" charset="-78"/>
+                <a:ea typeface="Amiri" pitchFamily="2" charset="-78"/>
                 <a:cs typeface="Amiri" pitchFamily="2" charset="-78"/>
               </a:rPr>
               <a:t>عَدَدُ أَفْرَادِ الأُسْرَةِ</a:t>
@@ -19463,6 +19572,7 @@
                   <a:srgbClr val="1B3B6F"/>
                 </a:solidFill>
                 <a:latin typeface="Amiri" pitchFamily="2" charset="-78"/>
+                <a:ea typeface="Amiri" pitchFamily="2" charset="-78"/>
                 <a:cs typeface="Amiri" pitchFamily="2" charset="-78"/>
               </a:rPr>
               <a:t>لُغَاتُهُمْ</a:t>
@@ -19707,6 +19817,7 @@
                   <a:srgbClr val="1B3B6F"/>
                 </a:solidFill>
                 <a:latin typeface="Amiri" pitchFamily="2" charset="-78"/>
+                <a:ea typeface="Amiri" pitchFamily="2" charset="-78"/>
                 <a:cs typeface="Amiri" pitchFamily="2" charset="-78"/>
               </a:rPr>
               <a:t>هِوَايَةٌ يُحِبُّهَا أَحَدُهُمْ</a:t>
@@ -19951,6 +20062,7 @@
                   <a:srgbClr val="1B3B6F"/>
                 </a:solidFill>
                 <a:latin typeface="Amiri" pitchFamily="2" charset="-78"/>
+                <a:ea typeface="Amiri" pitchFamily="2" charset="-78"/>
                 <a:cs typeface="Amiri" pitchFamily="2" charset="-78"/>
               </a:rPr>
               <a:t>شَيْءٌ يَحْتَاجُونَ إِلَيْهِ</a:t>
@@ -20130,6 +20242,7 @@
                   <a:srgbClr val="1B3B6F"/>
                 </a:solidFill>
                 <a:latin typeface="Amiri" pitchFamily="2" charset="-78"/>
+                <a:ea typeface="Amiri" pitchFamily="2" charset="-78"/>
                 <a:cs typeface="Amiri" pitchFamily="2" charset="-78"/>
               </a:rPr>
               <a:t>جُمْلَةٌ: كَيْفَ سَتُرَحِّبُ بِهِمْ؟</a:t>
@@ -20339,6 +20452,7 @@
                   <a:srgbClr val="D4AF37"/>
                 </a:solidFill>
                 <a:latin typeface="Amiri" pitchFamily="2" charset="-78"/>
+                <a:ea typeface="Amiri" pitchFamily="2" charset="-78"/>
                 <a:cs typeface="Amiri" pitchFamily="2" charset="-78"/>
               </a:rPr>
               <a:t>م</a:t>
@@ -20659,6 +20773,7 @@
                   <a:srgbClr val="8A6D1E"/>
                 </a:solidFill>
                 <a:latin typeface="Amiri" pitchFamily="2" charset="-78"/>
+                <a:ea typeface="Amiri" pitchFamily="2" charset="-78"/>
                 <a:cs typeface="Amiri" pitchFamily="2" charset="-78"/>
               </a:rPr>
               <a:t>نَمُوذَجُ الإِجَابَةِ</a:t>
@@ -20977,6 +21092,7 @@
                   <a:srgbClr val="1B3B6F"/>
                 </a:solidFill>
                 <a:latin typeface="Amiri" pitchFamily="2" charset="-78"/>
+                <a:ea typeface="Amiri" pitchFamily="2" charset="-78"/>
                 <a:cs typeface="Amiri" pitchFamily="2" charset="-78"/>
               </a:rPr>
               <a:t>أُسْرَةُ العَلَوِيِّ</a:t>
@@ -21015,6 +21131,7 @@
                   <a:srgbClr val="1B3B6F"/>
                 </a:solidFill>
                 <a:latin typeface="Amiri" pitchFamily="2" charset="-78"/>
+                <a:ea typeface="Amiri" pitchFamily="2" charset="-78"/>
                 <a:cs typeface="Amiri" pitchFamily="2" charset="-78"/>
               </a:rPr>
               <a:t>اسْمُ الأُسْرَةِ الجَدِيدَةِ</a:t>
@@ -21156,6 +21273,7 @@
                   <a:srgbClr val="1B3B6F"/>
                 </a:solidFill>
                 <a:latin typeface="Amiri" pitchFamily="2" charset="-78"/>
+                <a:ea typeface="Amiri" pitchFamily="2" charset="-78"/>
                 <a:cs typeface="Amiri" pitchFamily="2" charset="-78"/>
               </a:rPr>
               <a:t>اثْنَا عَشَرَ</a:t>
@@ -21194,6 +21312,7 @@
                   <a:srgbClr val="1B3B6F"/>
                 </a:solidFill>
                 <a:latin typeface="Amiri" pitchFamily="2" charset="-78"/>
+                <a:ea typeface="Amiri" pitchFamily="2" charset="-78"/>
                 <a:cs typeface="Amiri" pitchFamily="2" charset="-78"/>
               </a:rPr>
               <a:t>رَقْمُ البَيْتِ</a:t>
@@ -21335,6 +21454,7 @@
                   <a:srgbClr val="1B3B6F"/>
                 </a:solidFill>
                 <a:latin typeface="Amiri" pitchFamily="2" charset="-78"/>
+                <a:ea typeface="Amiri" pitchFamily="2" charset="-78"/>
                 <a:cs typeface="Amiri" pitchFamily="2" charset="-78"/>
               </a:rPr>
               <a:t>مِنَ المَغْرِبِ</a:t>
@@ -21373,6 +21493,7 @@
                   <a:srgbClr val="1B3B6F"/>
                 </a:solidFill>
                 <a:latin typeface="Amiri" pitchFamily="2" charset="-78"/>
+                <a:ea typeface="Amiri" pitchFamily="2" charset="-78"/>
                 <a:cs typeface="Amiri" pitchFamily="2" charset="-78"/>
               </a:rPr>
               <a:t>مِنْ أَيْنَ هُمْ؟</a:t>
@@ -21514,6 +21635,7 @@
                   <a:srgbClr val="1B3B6F"/>
                 </a:solidFill>
                 <a:latin typeface="Amiri" pitchFamily="2" charset="-78"/>
+                <a:ea typeface="Amiri" pitchFamily="2" charset="-78"/>
                 <a:cs typeface="Amiri" pitchFamily="2" charset="-78"/>
               </a:rPr>
               <a:t>أَرْبَعَةٌ: أَبٌ وَأُمٌّ وَبِنْتَانِ</a:t>
@@ -21552,6 +21674,7 @@
                   <a:srgbClr val="1B3B6F"/>
                 </a:solidFill>
                 <a:latin typeface="Amiri" pitchFamily="2" charset="-78"/>
+                <a:ea typeface="Amiri" pitchFamily="2" charset="-78"/>
                 <a:cs typeface="Amiri" pitchFamily="2" charset="-78"/>
               </a:rPr>
               <a:t>عَدَدُ أَفْرَادِ الأُسْرَةِ</a:t>
@@ -21693,6 +21816,7 @@
                   <a:srgbClr val="1B3B6F"/>
                 </a:solidFill>
                 <a:latin typeface="Amiri" pitchFamily="2" charset="-78"/>
+                <a:ea typeface="Amiri" pitchFamily="2" charset="-78"/>
                 <a:cs typeface="Amiri" pitchFamily="2" charset="-78"/>
               </a:rPr>
               <a:t>العَرَبِيَّةُ وَالفَرَنْسِيَّةُ</a:t>
@@ -21731,6 +21855,7 @@
                   <a:srgbClr val="1B3B6F"/>
                 </a:solidFill>
                 <a:latin typeface="Amiri" pitchFamily="2" charset="-78"/>
+                <a:ea typeface="Amiri" pitchFamily="2" charset="-78"/>
                 <a:cs typeface="Amiri" pitchFamily="2" charset="-78"/>
               </a:rPr>
               <a:t>لُغَاتُهُمْ</a:t>
@@ -21872,6 +21997,7 @@
                   <a:srgbClr val="1B3B6F"/>
                 </a:solidFill>
                 <a:latin typeface="Amiri" pitchFamily="2" charset="-78"/>
+                <a:ea typeface="Amiri" pitchFamily="2" charset="-78"/>
                 <a:cs typeface="Amiri" pitchFamily="2" charset="-78"/>
               </a:rPr>
               <a:t>الرَّسْمُ</a:t>
@@ -21910,6 +22036,7 @@
                   <a:srgbClr val="1B3B6F"/>
                 </a:solidFill>
                 <a:latin typeface="Amiri" pitchFamily="2" charset="-78"/>
+                <a:ea typeface="Amiri" pitchFamily="2" charset="-78"/>
                 <a:cs typeface="Amiri" pitchFamily="2" charset="-78"/>
               </a:rPr>
               <a:t>هِوَايَةٌ يُحِبُّهَا أَحَدُهُمْ</a:t>
@@ -22051,6 +22178,7 @@
                   <a:srgbClr val="1B3B6F"/>
                 </a:solidFill>
                 <a:latin typeface="Amiri" pitchFamily="2" charset="-78"/>
+                <a:ea typeface="Amiri" pitchFamily="2" charset="-78"/>
                 <a:cs typeface="Amiri" pitchFamily="2" charset="-78"/>
               </a:rPr>
               <a:t>رَقْمُ فَنِّيٍّ لِلثَّلَّاجَةِ</a:t>
@@ -22089,6 +22217,7 @@
                   <a:srgbClr val="1B3B6F"/>
                 </a:solidFill>
                 <a:latin typeface="Amiri" pitchFamily="2" charset="-78"/>
+                <a:ea typeface="Amiri" pitchFamily="2" charset="-78"/>
                 <a:cs typeface="Amiri" pitchFamily="2" charset="-78"/>
               </a:rPr>
               <a:t>شَيْءٌ يَحْتَاجُونَ إِلَيْهِ</a:t>
@@ -22230,6 +22359,7 @@
                   <a:srgbClr val="1B3B6F"/>
                 </a:solidFill>
                 <a:latin typeface="Amiri" pitchFamily="2" charset="-78"/>
+                <a:ea typeface="Amiri" pitchFamily="2" charset="-78"/>
                 <a:cs typeface="Amiri" pitchFamily="2" charset="-78"/>
               </a:rPr>
               <a:t>سَنَدْعُوهُمْ إِلَى العَشَاءِ يَوْمَ الجُمُعَةِ، لِأَنَّ مَطْبَخَهُمْ لَيْسَ جَاهِزًا بَعْدُ.</a:t>
@@ -22268,6 +22398,7 @@
                   <a:srgbClr val="1B3B6F"/>
                 </a:solidFill>
                 <a:latin typeface="Amiri" pitchFamily="2" charset="-78"/>
+                <a:ea typeface="Amiri" pitchFamily="2" charset="-78"/>
                 <a:cs typeface="Amiri" pitchFamily="2" charset="-78"/>
               </a:rPr>
               <a:t>جُمْلَةٌ: كَيْفَ سَتُرَحِّبُ بِهِمْ؟</a:t>
@@ -22477,6 +22608,7 @@
                   <a:srgbClr val="D4AF37"/>
                 </a:solidFill>
                 <a:latin typeface="Amiri" pitchFamily="2" charset="-78"/>
+                <a:ea typeface="Amiri" pitchFamily="2" charset="-78"/>
                 <a:cs typeface="Amiri" pitchFamily="2" charset="-78"/>
               </a:rPr>
               <a:t>م</a:t>
@@ -22797,6 +22929,7 @@
                   <a:srgbClr val="8A6D1E"/>
                 </a:solidFill>
                 <a:latin typeface="Amiri" pitchFamily="2" charset="-78"/>
+                <a:ea typeface="Amiri" pitchFamily="2" charset="-78"/>
                 <a:cs typeface="Amiri" pitchFamily="2" charset="-78"/>
               </a:rPr>
               <a:t>رِسَالَةٌ عَنْ جِيرَانِنَا الجُدُدِ</a:t>
@@ -23272,6 +23405,7 @@
                   <a:srgbClr val="1B3B6F"/>
                 </a:solidFill>
                 <a:latin typeface="Amiri" pitchFamily="2" charset="-78"/>
+                <a:ea typeface="Amiri" pitchFamily="2" charset="-78"/>
                 <a:cs typeface="Amiri" pitchFamily="2" charset="-78"/>
               </a:rPr>
               <a:t>انْتَقَلُوا إِلَى …</a:t>
@@ -23348,6 +23482,7 @@
                   <a:srgbClr val="1B3B6F"/>
                 </a:solidFill>
                 <a:latin typeface="Amiri" pitchFamily="2" charset="-78"/>
+                <a:ea typeface="Amiri" pitchFamily="2" charset="-78"/>
                 <a:cs typeface="Amiri" pitchFamily="2" charset="-78"/>
               </a:rPr>
               <a:t>هِيَ طَوِيلَةٌ، وَشَعْرُهَا …</a:t>
@@ -23424,6 +23559,7 @@
                   <a:srgbClr val="1B3B6F"/>
                 </a:solidFill>
                 <a:latin typeface="Amiri" pitchFamily="2" charset="-78"/>
+                <a:ea typeface="Amiri" pitchFamily="2" charset="-78"/>
                 <a:cs typeface="Amiri" pitchFamily="2" charset="-78"/>
               </a:rPr>
               <a:t>أَمْسِ سَاعَدْتُهُمْ فِي …</a:t>
@@ -23500,6 +23636,7 @@
                   <a:srgbClr val="1B3B6F"/>
                 </a:solidFill>
                 <a:latin typeface="Amiri" pitchFamily="2" charset="-78"/>
+                <a:ea typeface="Amiri" pitchFamily="2" charset="-78"/>
                 <a:cs typeface="Amiri" pitchFamily="2" charset="-78"/>
               </a:rPr>
               <a:t>سَنَدْعُوهُمْ إِلَى …</a:t>
@@ -23671,6 +23808,7 @@
                   <a:srgbClr val="D4AF37"/>
                 </a:solidFill>
                 <a:latin typeface="Amiri" pitchFamily="2" charset="-78"/>
+                <a:ea typeface="Amiri" pitchFamily="2" charset="-78"/>
                 <a:cs typeface="Amiri" pitchFamily="2" charset="-78"/>
               </a:rPr>
               <a:t>م</a:t>
@@ -23991,6 +24129,7 @@
                   <a:srgbClr val="8A6D1E"/>
                 </a:solidFill>
                 <a:latin typeface="Amiri" pitchFamily="2" charset="-78"/>
+                <a:ea typeface="Amiri" pitchFamily="2" charset="-78"/>
                 <a:cs typeface="Amiri" pitchFamily="2" charset="-78"/>
               </a:rPr>
               <a:t>نَصُّ السُّؤَالِ</a:t>
@@ -24271,6 +24410,7 @@
                   <a:srgbClr val="1B3B6F"/>
                 </a:solidFill>
                 <a:latin typeface="Amiri" pitchFamily="2" charset="-78"/>
+                <a:ea typeface="Amiri" pitchFamily="2" charset="-78"/>
                 <a:cs typeface="Amiri" pitchFamily="2" charset="-78"/>
               </a:rPr>
               <a:t>انْتَقَلَتْ أُسْرَةٌ جَدِيدَةٌ إِلَى البَيْتِ المُجَاوِرِ. اكْتُبِي رِسَالَةً إِلَى صَدِيقَتِكِ (٨٠–٩٠ كَلِمَةً).</a:t>
@@ -24412,6 +24552,7 @@
                   <a:srgbClr val="1B3B6F"/>
                 </a:solidFill>
                 <a:latin typeface="Amiri" pitchFamily="2" charset="-78"/>
+                <a:ea typeface="Amiri" pitchFamily="2" charset="-78"/>
                 <a:cs typeface="Amiri" pitchFamily="2" charset="-78"/>
               </a:rPr>
               <a:t>مَنْ هُمْ؟ وَمِنْ أَيْنَ هُمْ؟</a:t>
@@ -24553,6 +24694,7 @@
                   <a:srgbClr val="1B3B6F"/>
                 </a:solidFill>
                 <a:latin typeface="Amiri" pitchFamily="2" charset="-78"/>
+                <a:ea typeface="Amiri" pitchFamily="2" charset="-78"/>
                 <a:cs typeface="Amiri" pitchFamily="2" charset="-78"/>
               </a:rPr>
               <a:t>صِفِي أَحَدَ أَفْرَادِ الأُسْرَةِ (الشَّكْلُ وَالشَّخْصِيَّةُ).</a:t>
@@ -24694,6 +24836,7 @@
                   <a:srgbClr val="1B3B6F"/>
                 </a:solidFill>
                 <a:latin typeface="Amiri" pitchFamily="2" charset="-78"/>
+                <a:ea typeface="Amiri" pitchFamily="2" charset="-78"/>
                 <a:cs typeface="Amiri" pitchFamily="2" charset="-78"/>
               </a:rPr>
               <a:t>مَاذَا فَعَلْتِ مَعَهُمْ أَمْسِ؟</a:t>
@@ -24835,6 +24978,7 @@
                   <a:srgbClr val="1B3B6F"/>
                 </a:solidFill>
                 <a:latin typeface="Amiri" pitchFamily="2" charset="-78"/>
+                <a:ea typeface="Amiri" pitchFamily="2" charset="-78"/>
                 <a:cs typeface="Amiri" pitchFamily="2" charset="-78"/>
               </a:rPr>
               <a:t>كَيْفَ سَتُرَحِّبُونَ بِهِمْ؟ ادْعِي صَدِيقَتَكِ.</a:t>
@@ -25044,6 +25188,7 @@
                   <a:srgbClr val="D4AF37"/>
                 </a:solidFill>
                 <a:latin typeface="Amiri" pitchFamily="2" charset="-78"/>
+                <a:ea typeface="Amiri" pitchFamily="2" charset="-78"/>
                 <a:cs typeface="Amiri" pitchFamily="2" charset="-78"/>
               </a:rPr>
               <a:t>م</a:t>
@@ -25364,6 +25509,7 @@
                   <a:srgbClr val="8A6D1E"/>
                 </a:solidFill>
                 <a:latin typeface="Amiri" pitchFamily="2" charset="-78"/>
+                <a:ea typeface="Amiri" pitchFamily="2" charset="-78"/>
                 <a:cs typeface="Amiri" pitchFamily="2" charset="-78"/>
               </a:rPr>
               <a:t>قَوَالِبُ الكِتَابَةِ</a:t>
@@ -25644,6 +25790,7 @@
                   <a:srgbClr val="1B3B6F"/>
                 </a:solidFill>
                 <a:latin typeface="Amiri" pitchFamily="2" charset="-78"/>
+                <a:ea typeface="Amiri" pitchFamily="2" charset="-78"/>
                 <a:cs typeface="Amiri" pitchFamily="2" charset="-78"/>
               </a:rPr>
               <a:t>مَرْحَبًا يَا ______ ، كَيْفَ حَالُكِ؟</a:t>
@@ -25850,6 +25997,7 @@
                   <a:srgbClr val="1B3B6F"/>
                 </a:solidFill>
                 <a:latin typeface="Amiri" pitchFamily="2" charset="-78"/>
+                <a:ea typeface="Amiri" pitchFamily="2" charset="-78"/>
                 <a:cs typeface="Amiri" pitchFamily="2" charset="-78"/>
               </a:rPr>
               <a:t>عِنْدَنَا جِيرَانٌ جُدُدٌ مِنْ ______ : ______ .</a:t>
@@ -26056,6 +26204,7 @@
                   <a:srgbClr val="1B3B6F"/>
                 </a:solidFill>
                 <a:latin typeface="Amiri" pitchFamily="2" charset="-78"/>
+                <a:ea typeface="Amiri" pitchFamily="2" charset="-78"/>
                 <a:cs typeface="Amiri" pitchFamily="2" charset="-78"/>
               </a:rPr>
               <a:t>______ اسْمُهَا / اسْمُهُ ______ . هِيَ / هُوَ ______ ، وَ ______ .</a:t>
@@ -26262,6 +26411,7 @@
                   <a:srgbClr val="1B3B6F"/>
                 </a:solidFill>
                 <a:latin typeface="Amiri" pitchFamily="2" charset="-78"/>
+                <a:ea typeface="Amiri" pitchFamily="2" charset="-78"/>
                 <a:cs typeface="Amiri" pitchFamily="2" charset="-78"/>
               </a:rPr>
               <a:t>أَمْسِ سَاعَدْتُهُمْ فِي ______ ، ثُمَّ ______ .</a:t>
@@ -26468,6 +26618,7 @@
                   <a:srgbClr val="1B3B6F"/>
                 </a:solidFill>
                 <a:latin typeface="Amiri" pitchFamily="2" charset="-78"/>
+                <a:ea typeface="Amiri" pitchFamily="2" charset="-78"/>
                 <a:cs typeface="Amiri" pitchFamily="2" charset="-78"/>
               </a:rPr>
               <a:t>سَنَدْعُوهُمْ إِلَى ______ . هَلْ تَأْتِينَ؟</a:t>
@@ -26674,6 +26825,7 @@
                   <a:srgbClr val="1B3B6F"/>
                 </a:solidFill>
                 <a:latin typeface="Amiri" pitchFamily="2" charset="-78"/>
+                <a:ea typeface="Amiri" pitchFamily="2" charset="-78"/>
                 <a:cs typeface="Amiri" pitchFamily="2" charset="-78"/>
               </a:rPr>
               <a:t>مَعَ السَّلَامَةِ، ______</a:t>
@@ -26913,13 +27065,9 @@
     <a:fontScheme name="Office">
       <a:majorFont>
         <a:latin typeface="Calibri Light" panose="020F0302020204030204"/>
-        <a:ea typeface=""/>
-        <a:cs typeface=""/>
-        <a:font script="Jpan" typeface="游ゴシック Light"/>
-        <a:font script="Hang" typeface="맑은 고딕"/>
-        <a:font script="Hans" typeface="等线 Light"/>
-        <a:font script="Hant" typeface="新細明體"/>
-        <a:font script="Arab" typeface="Times New Roman"/>
+        <a:ea typeface="Amiri" pitchFamily="2" charset="-78"/>
+        <a:cs typeface="Amiri" pitchFamily="2" charset="-78"/>
+        <a:font script="Arab" typeface="Amiri"/>
         <a:font script="Hebr" typeface="Times New Roman"/>
         <a:font script="Thai" typeface="Angsana New"/>
         <a:font script="Ethi" typeface="Nyala"/>
@@ -26965,13 +27113,9 @@
       </a:majorFont>
       <a:minorFont>
         <a:latin typeface="Calibri" panose="020F0502020204030204"/>
-        <a:ea typeface=""/>
-        <a:cs typeface=""/>
-        <a:font script="Jpan" typeface="游ゴシック"/>
-        <a:font script="Hang" typeface="맑은 고딕"/>
-        <a:font script="Hans" typeface="等线"/>
-        <a:font script="Hant" typeface="新細明體"/>
-        <a:font script="Arab" typeface="Arial"/>
+        <a:ea typeface="Amiri" pitchFamily="2" charset="-78"/>
+        <a:cs typeface="Amiri" pitchFamily="2" charset="-78"/>
+        <a:font script="Arab" typeface="Amiri"/>
         <a:font script="Hebr" typeface="Arial"/>
         <a:font script="Thai" typeface="Cordia New"/>
         <a:font script="Ethi" typeface="Nyala"/>

--- a/Topic_B/Exam_Practice/TB-L10_Writing_Workshop_Topic_B_Listening_and_Reading_Workshop.pptx
+++ b/Topic_B/Exam_Practice/TB-L10_Writing_Workshop_Topic_B_Listening_and_Reading_Workshop.pptx
@@ -3848,7 +3848,7 @@
                 <a:solidFill>
                   <a:srgbClr val="FFFFFF"/>
                 </a:solidFill>
-                <a:latin typeface="Calibri" pitchFamily="34" charset="0"/>
+                <a:latin typeface="Amiri" pitchFamily="2" charset="-78"/>
                 <a:ea typeface="Amiri" pitchFamily="2" charset="-78"/>
                 <a:cs typeface="Amiri" pitchFamily="2" charset="-78"/>
               </a:rPr>
@@ -3914,7 +3914,7 @@
                 <a:solidFill>
                   <a:srgbClr val="FFFFFF"/>
                 </a:solidFill>
-                <a:latin typeface="Calibri" pitchFamily="34" charset="0"/>
+                <a:latin typeface="Amiri" pitchFamily="2" charset="-78"/>
                 <a:ea typeface="Amiri" pitchFamily="2" charset="-78"/>
                 <a:cs typeface="Amiri" pitchFamily="2" charset="-78"/>
               </a:rPr>
@@ -3980,7 +3980,7 @@
                 <a:solidFill>
                   <a:srgbClr val="FFFFFF"/>
                 </a:solidFill>
-                <a:latin typeface="Calibri" pitchFamily="34" charset="0"/>
+                <a:latin typeface="Amiri" pitchFamily="2" charset="-78"/>
                 <a:ea typeface="Amiri" pitchFamily="2" charset="-78"/>
                 <a:cs typeface="Amiri" pitchFamily="2" charset="-78"/>
               </a:rPr>
@@ -4046,7 +4046,7 @@
                 <a:solidFill>
                   <a:srgbClr val="FFFFFF"/>
                 </a:solidFill>
-                <a:latin typeface="Calibri" pitchFamily="34" charset="0"/>
+                <a:latin typeface="Amiri" pitchFamily="2" charset="-78"/>
                 <a:ea typeface="Amiri" pitchFamily="2" charset="-78"/>
                 <a:cs typeface="Amiri" pitchFamily="2" charset="-78"/>
               </a:rPr>
@@ -4844,7 +4844,7 @@
                 <a:solidFill>
                   <a:srgbClr val="FFFFFF"/>
                 </a:solidFill>
-                <a:latin typeface="Calibri" pitchFamily="34" charset="0"/>
+                <a:latin typeface="Amiri" pitchFamily="2" charset="-78"/>
                 <a:ea typeface="Amiri" pitchFamily="2" charset="-78"/>
                 <a:cs typeface="Amiri" pitchFamily="2" charset="-78"/>
               </a:rPr>
@@ -4910,7 +4910,7 @@
                 <a:solidFill>
                   <a:srgbClr val="FFFFFF"/>
                 </a:solidFill>
-                <a:latin typeface="Calibri" pitchFamily="34" charset="0"/>
+                <a:latin typeface="Amiri" pitchFamily="2" charset="-78"/>
                 <a:ea typeface="Amiri" pitchFamily="2" charset="-78"/>
                 <a:cs typeface="Amiri" pitchFamily="2" charset="-78"/>
               </a:rPr>
@@ -4976,7 +4976,7 @@
                 <a:solidFill>
                   <a:srgbClr val="FFFFFF"/>
                 </a:solidFill>
-                <a:latin typeface="Calibri" pitchFamily="34" charset="0"/>
+                <a:latin typeface="Amiri" pitchFamily="2" charset="-78"/>
                 <a:ea typeface="Amiri" pitchFamily="2" charset="-78"/>
                 <a:cs typeface="Amiri" pitchFamily="2" charset="-78"/>
               </a:rPr>
@@ -5042,7 +5042,7 @@
                 <a:solidFill>
                   <a:srgbClr val="FFFFFF"/>
                 </a:solidFill>
-                <a:latin typeface="Calibri" pitchFamily="34" charset="0"/>
+                <a:latin typeface="Amiri" pitchFamily="2" charset="-78"/>
                 <a:ea typeface="Amiri" pitchFamily="2" charset="-78"/>
                 <a:cs typeface="Amiri" pitchFamily="2" charset="-78"/>
               </a:rPr>
@@ -8599,7 +8599,7 @@
                 <a:solidFill>
                   <a:srgbClr val="FFFFFF"/>
                 </a:solidFill>
-                <a:latin typeface="Calibri" pitchFamily="34" charset="0"/>
+                <a:latin typeface="Amiri" pitchFamily="2" charset="-78"/>
                 <a:ea typeface="Amiri" pitchFamily="2" charset="-78"/>
                 <a:cs typeface="Amiri" pitchFamily="2" charset="-78"/>
               </a:rPr>
@@ -8665,7 +8665,7 @@
                 <a:solidFill>
                   <a:srgbClr val="FFFFFF"/>
                 </a:solidFill>
-                <a:latin typeface="Calibri" pitchFamily="34" charset="0"/>
+                <a:latin typeface="Amiri" pitchFamily="2" charset="-78"/>
                 <a:ea typeface="Amiri" pitchFamily="2" charset="-78"/>
                 <a:cs typeface="Amiri" pitchFamily="2" charset="-78"/>
               </a:rPr>
@@ -8731,7 +8731,7 @@
                 <a:solidFill>
                   <a:srgbClr val="FFFFFF"/>
                 </a:solidFill>
-                <a:latin typeface="Calibri" pitchFamily="34" charset="0"/>
+                <a:latin typeface="Amiri" pitchFamily="2" charset="-78"/>
                 <a:ea typeface="Amiri" pitchFamily="2" charset="-78"/>
                 <a:cs typeface="Amiri" pitchFamily="2" charset="-78"/>
               </a:rPr>
@@ -8797,7 +8797,7 @@
                 <a:solidFill>
                   <a:srgbClr val="FFFFFF"/>
                 </a:solidFill>
-                <a:latin typeface="Calibri" pitchFamily="34" charset="0"/>
+                <a:latin typeface="Amiri" pitchFamily="2" charset="-78"/>
                 <a:ea typeface="Amiri" pitchFamily="2" charset="-78"/>
                 <a:cs typeface="Amiri" pitchFamily="2" charset="-78"/>
               </a:rPr>
@@ -9584,7 +9584,7 @@
                 <a:solidFill>
                   <a:srgbClr val="FFFFFF"/>
                 </a:solidFill>
-                <a:latin typeface="Calibri" pitchFamily="34" charset="0"/>
+                <a:latin typeface="Amiri" pitchFamily="2" charset="-78"/>
                 <a:ea typeface="Amiri" pitchFamily="2" charset="-78"/>
                 <a:cs typeface="Amiri" pitchFamily="2" charset="-78"/>
               </a:rPr>
@@ -9650,7 +9650,7 @@
                 <a:solidFill>
                   <a:srgbClr val="FFFFFF"/>
                 </a:solidFill>
-                <a:latin typeface="Calibri" pitchFamily="34" charset="0"/>
+                <a:latin typeface="Amiri" pitchFamily="2" charset="-78"/>
                 <a:ea typeface="Amiri" pitchFamily="2" charset="-78"/>
                 <a:cs typeface="Amiri" pitchFamily="2" charset="-78"/>
               </a:rPr>
@@ -9716,7 +9716,7 @@
                 <a:solidFill>
                   <a:srgbClr val="FFFFFF"/>
                 </a:solidFill>
-                <a:latin typeface="Calibri" pitchFamily="34" charset="0"/>
+                <a:latin typeface="Amiri" pitchFamily="2" charset="-78"/>
                 <a:ea typeface="Amiri" pitchFamily="2" charset="-78"/>
                 <a:cs typeface="Amiri" pitchFamily="2" charset="-78"/>
               </a:rPr>
@@ -9782,7 +9782,7 @@
                 <a:solidFill>
                   <a:srgbClr val="FFFFFF"/>
                 </a:solidFill>
-                <a:latin typeface="Calibri" pitchFamily="34" charset="0"/>
+                <a:latin typeface="Amiri" pitchFamily="2" charset="-78"/>
                 <a:ea typeface="Amiri" pitchFamily="2" charset="-78"/>
                 <a:cs typeface="Amiri" pitchFamily="2" charset="-78"/>
               </a:rPr>
@@ -10569,7 +10569,7 @@
                 <a:solidFill>
                   <a:srgbClr val="FFFFFF"/>
                 </a:solidFill>
-                <a:latin typeface="Calibri" pitchFamily="34" charset="0"/>
+                <a:latin typeface="Amiri" pitchFamily="2" charset="-78"/>
                 <a:ea typeface="Amiri" pitchFamily="2" charset="-78"/>
                 <a:cs typeface="Amiri" pitchFamily="2" charset="-78"/>
               </a:rPr>
@@ -10635,7 +10635,7 @@
                 <a:solidFill>
                   <a:srgbClr val="FFFFFF"/>
                 </a:solidFill>
-                <a:latin typeface="Calibri" pitchFamily="34" charset="0"/>
+                <a:latin typeface="Amiri" pitchFamily="2" charset="-78"/>
                 <a:ea typeface="Amiri" pitchFamily="2" charset="-78"/>
                 <a:cs typeface="Amiri" pitchFamily="2" charset="-78"/>
               </a:rPr>
@@ -10701,7 +10701,7 @@
                 <a:solidFill>
                   <a:srgbClr val="FFFFFF"/>
                 </a:solidFill>
-                <a:latin typeface="Calibri" pitchFamily="34" charset="0"/>
+                <a:latin typeface="Amiri" pitchFamily="2" charset="-78"/>
                 <a:ea typeface="Amiri" pitchFamily="2" charset="-78"/>
                 <a:cs typeface="Amiri" pitchFamily="2" charset="-78"/>
               </a:rPr>
@@ -10767,7 +10767,7 @@
                 <a:solidFill>
                   <a:srgbClr val="FFFFFF"/>
                 </a:solidFill>
-                <a:latin typeface="Calibri" pitchFamily="34" charset="0"/>
+                <a:latin typeface="Amiri" pitchFamily="2" charset="-78"/>
                 <a:ea typeface="Amiri" pitchFamily="2" charset="-78"/>
                 <a:cs typeface="Amiri" pitchFamily="2" charset="-78"/>
               </a:rPr>
